--- a/Ch17_Italy_Germany.pptx
+++ b/Ch17_Italy_Germany.pptx
@@ -4909,7 +4909,7 @@
                   </a:extLst>
                 </a:hlinkClick>
               </a:rPr>
-              <a:t>https://www.youtube.com/watch?v=iRCMYgWcwXM</a:t>
+              <a:t>https://www.youtube.com/watch?v=wH64J5f-DHY</a:t>
             </a:r>
             <a:endParaRPr lang="en-US" sz="1800" dirty="0"/>
           </a:p>
@@ -7365,7 +7365,7 @@
                   </a:extLst>
                 </a:hlinkClick>
               </a:rPr>
-              <a:t>https://www.youtube.com/watch?v=5DW5GnCFCFo</a:t>
+              <a:t>https://www.youtube.com/watch?v=URt-9qZZxPU</a:t>
             </a:r>
             <a:endParaRPr lang="en-US" sz="1800" dirty="0"/>
           </a:p>
@@ -13878,7 +13878,7 @@
                   </a:extLst>
                 </a:hlinkClick>
               </a:rPr>
-              <a:t>https://www.youtube.com/watch?v=O_XLw6WOgPo</a:t>
+              <a:t>https://www.youtube.com/watch?v=iNXNdI-usmA</a:t>
             </a:r>
             <a:endParaRPr lang="en-US" sz="1800" dirty="0"/>
           </a:p>
@@ -15535,7 +15535,7 @@
                   </a:extLst>
                 </a:hlinkClick>
               </a:rPr>
-              <a:t>NAWM 95: https://www.youtube.com/watch?v=BVpFPt2lXCU</a:t>
+              <a:t>NAWM 95: https://www.youtube.com/watch?v=PG4Rgg3ujjo</a:t>
             </a:r>
             <a:endParaRPr lang="en-US" sz="1800" dirty="0"/>
           </a:p>
